--- a/ch02_microbiome_data/figures/overview_characteristics.pptx
+++ b/ch02_microbiome_data/figures/overview_characteristics.pptx
@@ -371,7 +371,7 @@
           <a:p>
             <a:fld id="{C764DE79-268F-4C1A-8933-263129D2AF90}" type="datetimeFigureOut">
               <a:rPr lang="en-US" smtClean="0"/>
-              <a:t>6/16/2026</a:t>
+              <a:t>7/4/2026</a:t>
             </a:fld>
             <a:endParaRPr lang="en-US" dirty="0"/>
           </a:p>
@@ -542,7 +542,7 @@
           <a:p>
             <a:fld id="{C764DE79-268F-4C1A-8933-263129D2AF90}" type="datetimeFigureOut">
               <a:rPr lang="en-US" smtClean="0"/>
-              <a:t>6/16/2026</a:t>
+              <a:t>7/4/2026</a:t>
             </a:fld>
             <a:endParaRPr lang="en-US" dirty="0"/>
           </a:p>
@@ -723,7 +723,7 @@
           <a:p>
             <a:fld id="{C764DE79-268F-4C1A-8933-263129D2AF90}" type="datetimeFigureOut">
               <a:rPr lang="en-US" smtClean="0"/>
-              <a:t>6/16/2026</a:t>
+              <a:t>7/4/2026</a:t>
             </a:fld>
             <a:endParaRPr lang="en-US" dirty="0"/>
           </a:p>
@@ -929,7 +929,7 @@
           <a:p>
             <a:fld id="{C764DE79-268F-4C1A-8933-263129D2AF90}" type="datetimeFigureOut">
               <a:rPr lang="en-US" smtClean="0"/>
-              <a:t>6/16/2026</a:t>
+              <a:t>7/4/2026</a:t>
             </a:fld>
             <a:endParaRPr lang="en-US" dirty="0"/>
           </a:p>
@@ -1176,7 +1176,7 @@
           <a:p>
             <a:fld id="{C764DE79-268F-4C1A-8933-263129D2AF90}" type="datetimeFigureOut">
               <a:rPr lang="en-US" smtClean="0"/>
-              <a:t>6/16/2026</a:t>
+              <a:t>7/4/2026</a:t>
             </a:fld>
             <a:endParaRPr lang="en-US" dirty="0"/>
           </a:p>
@@ -1409,7 +1409,7 @@
           <a:p>
             <a:fld id="{C764DE79-268F-4C1A-8933-263129D2AF90}" type="datetimeFigureOut">
               <a:rPr lang="en-US" smtClean="0"/>
-              <a:t>6/16/2026</a:t>
+              <a:t>7/4/2026</a:t>
             </a:fld>
             <a:endParaRPr lang="en-US" dirty="0"/>
           </a:p>
@@ -1777,7 +1777,7 @@
           <a:p>
             <a:fld id="{C764DE79-268F-4C1A-8933-263129D2AF90}" type="datetimeFigureOut">
               <a:rPr lang="en-US" smtClean="0"/>
-              <a:t>6/16/2026</a:t>
+              <a:t>7/4/2026</a:t>
             </a:fld>
             <a:endParaRPr lang="en-US" dirty="0"/>
           </a:p>
@@ -1896,7 +1896,7 @@
           <a:p>
             <a:fld id="{C764DE79-268F-4C1A-8933-263129D2AF90}" type="datetimeFigureOut">
               <a:rPr lang="en-US" smtClean="0"/>
-              <a:t>6/16/2026</a:t>
+              <a:t>7/4/2026</a:t>
             </a:fld>
             <a:endParaRPr lang="en-US" dirty="0"/>
           </a:p>
@@ -1992,7 +1992,7 @@
           <a:p>
             <a:fld id="{C764DE79-268F-4C1A-8933-263129D2AF90}" type="datetimeFigureOut">
               <a:rPr lang="en-US" smtClean="0"/>
-              <a:t>6/16/2026</a:t>
+              <a:t>7/4/2026</a:t>
             </a:fld>
             <a:endParaRPr lang="en-US" dirty="0"/>
           </a:p>
@@ -2270,7 +2270,7 @@
           <a:p>
             <a:fld id="{C764DE79-268F-4C1A-8933-263129D2AF90}" type="datetimeFigureOut">
               <a:rPr lang="en-US" smtClean="0"/>
-              <a:t>6/16/2026</a:t>
+              <a:t>7/4/2026</a:t>
             </a:fld>
             <a:endParaRPr lang="en-US" dirty="0"/>
           </a:p>
@@ -2528,7 +2528,7 @@
           <a:p>
             <a:fld id="{C764DE79-268F-4C1A-8933-263129D2AF90}" type="datetimeFigureOut">
               <a:rPr lang="en-US" smtClean="0"/>
-              <a:t>6/16/2026</a:t>
+              <a:t>7/4/2026</a:t>
             </a:fld>
             <a:endParaRPr lang="en-US" dirty="0"/>
           </a:p>
@@ -2742,7 +2742,7 @@
           <a:p>
             <a:fld id="{C764DE79-268F-4C1A-8933-263129D2AF90}" type="datetimeFigureOut">
               <a:rPr lang="en-US" smtClean="0"/>
-              <a:t>6/16/2026</a:t>
+              <a:t>7/4/2026</a:t>
             </a:fld>
             <a:endParaRPr lang="en-US" dirty="0"/>
           </a:p>
@@ -12974,7 +12974,7 @@
             <a:avLst/>
           </a:prstGeom>
           <a:noFill/>
-          <a:ln w="31750">
+          <a:ln w="44450">
             <a:solidFill>
               <a:schemeClr val="accent5">
                 <a:lumMod val="75000"/>
@@ -13028,7 +13028,7 @@
             <a:avLst/>
           </a:prstGeom>
           <a:noFill/>
-          <a:ln w="31750">
+          <a:ln w="44450">
             <a:solidFill>
               <a:srgbClr val="ED7C2F"/>
             </a:solidFill>
@@ -13080,7 +13080,7 @@
             <a:avLst/>
           </a:prstGeom>
           <a:noFill/>
-          <a:ln w="31750">
+          <a:ln w="44450">
             <a:solidFill>
               <a:schemeClr val="accent6"/>
             </a:solidFill>
@@ -13132,7 +13132,7 @@
             <a:avLst/>
           </a:prstGeom>
           <a:noFill/>
-          <a:ln w="31750">
+          <a:ln w="44450">
             <a:solidFill>
               <a:srgbClr val="CC79A7"/>
             </a:solidFill>
